--- a/Schematic.pptx
+++ b/Schematic.pptx
@@ -104,6 +104,11 @@
       </a:defRPr>
     </a:lvl9pPr>
   </p:defaultTextStyle>
+  <p:extLst>
+    <p:ext uri="{EFAFB233-063F-42B5-8137-9DF3F51BA10A}">
+      <p15:sldGuideLst xmlns:p15="http://schemas.microsoft.com/office/powerpoint/2012/main"/>
+    </p:ext>
+  </p:extLst>
 </p:presentation>
 </file>
 
@@ -3592,7 +3597,7 @@
         <p:spPr>
           <a:xfrm>
             <a:off x="1814297" y="4841766"/>
-            <a:ext cx="4129303" cy="1138773"/>
+            <a:ext cx="4129303" cy="1415772"/>
           </a:xfrm>
           <a:prstGeom prst="rect">
             <a:avLst/>
@@ -3613,7 +3618,15 @@
           <a:p>
             <a:r>
               <a:rPr lang="sv-SE" dirty="0"/>
-              <a:t>15 olika ljusstyrkor</a:t>
+              <a:t>15 olika ljusstyrkor. Styr också hastighet av lägen </a:t>
+            </a:r>
+            <a:r>
+              <a:rPr lang="sv-SE"/>
+              <a:t>från Knapp </a:t>
+            </a:r>
+            <a:r>
+              <a:rPr lang="sv-SE" dirty="0"/>
+              <a:t>2.</a:t>
             </a:r>
           </a:p>
           <a:p>
